--- a/probability_and_statistics/2_descriptive/measure_of_dispersion_var_stdDev_Range_Q1_Q2_Q3_IQR/ML Stats-variance-why_do_need_it.pptx
+++ b/probability_and_statistics/2_descriptive/measure_of_dispersion_var_stdDev_Range_Q1_Q2_Q3_IQR/ML Stats-variance-why_do_need_it.pptx
@@ -216,7 +216,7 @@
           <a:p>
             <a:fld id="{7BAEECA8-D063-486F-AE31-5020270C1449}" type="datetimeFigureOut">
               <a:rPr lang="en-US" smtClean="0"/>
-              <a:t>10/7/2025</a:t>
+              <a:t>4/29/2026</a:t>
             </a:fld>
             <a:endParaRPr lang="en-US"/>
           </a:p>
@@ -393,7 +393,7 @@
           <a:p>
             <a:fld id="{FA102A78-C460-4462-8104-10395055D720}" type="datetimeFigureOut">
               <a:rPr lang="en-US" smtClean="0"/>
-              <a:t>10/7/2025</a:t>
+              <a:t>4/29/2026</a:t>
             </a:fld>
             <a:endParaRPr lang="en-US"/>
           </a:p>
@@ -891,7 +891,7 @@
           <a:p>
             <a:fld id="{6383FAE1-13DE-4511-8C1B-C8AFB720664C}" type="datetimeFigureOut">
               <a:rPr lang="en-US" smtClean="0"/>
-              <a:t>10/7/2025</a:t>
+              <a:t>4/29/2026</a:t>
             </a:fld>
             <a:endParaRPr lang="en-US"/>
           </a:p>
@@ -1089,7 +1089,7 @@
           <a:p>
             <a:fld id="{6383FAE1-13DE-4511-8C1B-C8AFB720664C}" type="datetimeFigureOut">
               <a:rPr lang="en-US" smtClean="0"/>
-              <a:t>10/7/2025</a:t>
+              <a:t>4/29/2026</a:t>
             </a:fld>
             <a:endParaRPr lang="en-US"/>
           </a:p>
@@ -1297,7 +1297,7 @@
           <a:p>
             <a:fld id="{6383FAE1-13DE-4511-8C1B-C8AFB720664C}" type="datetimeFigureOut">
               <a:rPr lang="en-US" smtClean="0"/>
-              <a:t>10/7/2025</a:t>
+              <a:t>4/29/2026</a:t>
             </a:fld>
             <a:endParaRPr lang="en-US"/>
           </a:p>
@@ -1495,7 +1495,7 @@
           <a:p>
             <a:fld id="{6383FAE1-13DE-4511-8C1B-C8AFB720664C}" type="datetimeFigureOut">
               <a:rPr lang="en-US" smtClean="0"/>
-              <a:t>10/7/2025</a:t>
+              <a:t>4/29/2026</a:t>
             </a:fld>
             <a:endParaRPr lang="en-US"/>
           </a:p>
@@ -1770,7 +1770,7 @@
           <a:p>
             <a:fld id="{6383FAE1-13DE-4511-8C1B-C8AFB720664C}" type="datetimeFigureOut">
               <a:rPr lang="en-US" smtClean="0"/>
-              <a:t>10/7/2025</a:t>
+              <a:t>4/29/2026</a:t>
             </a:fld>
             <a:endParaRPr lang="en-US"/>
           </a:p>
@@ -2035,7 +2035,7 @@
           <a:p>
             <a:fld id="{6383FAE1-13DE-4511-8C1B-C8AFB720664C}" type="datetimeFigureOut">
               <a:rPr lang="en-US" smtClean="0"/>
-              <a:t>10/7/2025</a:t>
+              <a:t>4/29/2026</a:t>
             </a:fld>
             <a:endParaRPr lang="en-US"/>
           </a:p>
@@ -2447,7 +2447,7 @@
           <a:p>
             <a:fld id="{6383FAE1-13DE-4511-8C1B-C8AFB720664C}" type="datetimeFigureOut">
               <a:rPr lang="en-US" smtClean="0"/>
-              <a:t>10/7/2025</a:t>
+              <a:t>4/29/2026</a:t>
             </a:fld>
             <a:endParaRPr lang="en-US"/>
           </a:p>
@@ -2588,7 +2588,7 @@
           <a:p>
             <a:fld id="{6383FAE1-13DE-4511-8C1B-C8AFB720664C}" type="datetimeFigureOut">
               <a:rPr lang="en-US" smtClean="0"/>
-              <a:t>10/7/2025</a:t>
+              <a:t>4/29/2026</a:t>
             </a:fld>
             <a:endParaRPr lang="en-US"/>
           </a:p>
@@ -2701,7 +2701,7 @@
           <a:p>
             <a:fld id="{6383FAE1-13DE-4511-8C1B-C8AFB720664C}" type="datetimeFigureOut">
               <a:rPr lang="en-US" smtClean="0"/>
-              <a:t>10/7/2025</a:t>
+              <a:t>4/29/2026</a:t>
             </a:fld>
             <a:endParaRPr lang="en-US"/>
           </a:p>
@@ -3012,7 +3012,7 @@
           <a:p>
             <a:fld id="{6383FAE1-13DE-4511-8C1B-C8AFB720664C}" type="datetimeFigureOut">
               <a:rPr lang="en-US" smtClean="0"/>
-              <a:t>10/7/2025</a:t>
+              <a:t>4/29/2026</a:t>
             </a:fld>
             <a:endParaRPr lang="en-US"/>
           </a:p>
@@ -3303,7 +3303,7 @@
           <a:p>
             <a:fld id="{6383FAE1-13DE-4511-8C1B-C8AFB720664C}" type="datetimeFigureOut">
               <a:rPr lang="en-US" smtClean="0"/>
-              <a:t>10/7/2025</a:t>
+              <a:t>4/29/2026</a:t>
             </a:fld>
             <a:endParaRPr lang="en-US"/>
           </a:p>
@@ -3547,7 +3547,7 @@
           <a:p>
             <a:fld id="{6383FAE1-13DE-4511-8C1B-C8AFB720664C}" type="datetimeFigureOut">
               <a:rPr lang="en-US" smtClean="0"/>
-              <a:t>10/7/2025</a:t>
+              <a:t>4/29/2026</a:t>
             </a:fld>
             <a:endParaRPr lang="en-US"/>
           </a:p>
@@ -4109,820 +4109,20 @@
       </p:grpSpPr>
       <p:sp>
         <p:nvSpPr>
-          <p:cNvPr id="2" name="Title 1">
-            <a:extLst>
-              <a:ext uri="{FF2B5EF4-FFF2-40B4-BE49-F238E27FC236}">
-                <a16:creationId xmlns:a16="http://schemas.microsoft.com/office/drawing/2014/main" id="{537DD396-131F-DBF3-8C7C-E75A82BCE4AD}"/>
-              </a:ext>
-            </a:extLst>
-          </p:cNvPr>
-          <p:cNvSpPr>
-            <a:spLocks noGrp="1"/>
-          </p:cNvSpPr>
-          <p:nvPr>
-            <p:ph type="title"/>
-          </p:nvPr>
+          <p:cNvPr id="9" name="TextBox 8">
+            <a:extLst>
+              <a:ext uri="{FF2B5EF4-FFF2-40B4-BE49-F238E27FC236}">
+                <a16:creationId xmlns:a16="http://schemas.microsoft.com/office/drawing/2014/main" id="{493EC86F-C960-307F-F4FD-ECBB7FED3E8A}"/>
+              </a:ext>
+            </a:extLst>
+          </p:cNvPr>
+          <p:cNvSpPr txBox="1"/>
+          <p:nvPr/>
         </p:nvSpPr>
         <p:spPr>
           <a:xfrm>
-            <a:off x="701964" y="178312"/>
-            <a:ext cx="8799123" cy="529610"/>
-          </a:xfrm>
-        </p:spPr>
-        <p:txBody>
-          <a:bodyPr>
-            <a:noAutofit/>
-          </a:bodyPr>
-          <a:lstStyle/>
-          <a:p>
-            <a:pPr algn="ctr"/>
-            <a:r>
-              <a:rPr lang="en-US" sz="2800" b="1" dirty="0"/>
-              <a:t>Variance</a:t>
-            </a:r>
-            <a:endParaRPr lang="en-IN" sz="2800" b="1" dirty="0"/>
-          </a:p>
-        </p:txBody>
-      </p:sp>
-      <p:graphicFrame>
-        <p:nvGraphicFramePr>
-          <p:cNvPr id="6" name="Table 5">
-            <a:extLst>
-              <a:ext uri="{FF2B5EF4-FFF2-40B4-BE49-F238E27FC236}">
-                <a16:creationId xmlns:a16="http://schemas.microsoft.com/office/drawing/2014/main" id="{45DF5CCC-6C41-20C6-BFCA-85976D95FC64}"/>
-              </a:ext>
-            </a:extLst>
-          </p:cNvPr>
-          <p:cNvGraphicFramePr>
-            <a:graphicFrameLocks noGrp="1"/>
-          </p:cNvGraphicFramePr>
-          <p:nvPr>
-            <p:extLst>
-              <p:ext uri="{D42A27DB-BD31-4B8C-83A1-F6EECF244321}">
-                <p14:modId xmlns:p14="http://schemas.microsoft.com/office/powerpoint/2010/main" val="1390853953"/>
-              </p:ext>
-            </p:extLst>
-          </p:nvPr>
-        </p:nvGraphicFramePr>
-        <p:xfrm>
-          <a:off x="838200" y="2218214"/>
-          <a:ext cx="10515600" cy="3566160"/>
-        </p:xfrm>
-        <a:graphic>
-          <a:graphicData uri="http://schemas.openxmlformats.org/drawingml/2006/table">
-            <a:tbl>
-              <a:tblPr/>
-              <a:tblGrid>
-                <a:gridCol w="3505200">
-                  <a:extLst>
-                    <a:ext uri="{9D8B030D-6E8A-4147-A177-3AD203B41FA5}">
-                      <a16:colId xmlns:a16="http://schemas.microsoft.com/office/drawing/2014/main" val="4178535945"/>
-                    </a:ext>
-                  </a:extLst>
-                </a:gridCol>
-                <a:gridCol w="3505200">
-                  <a:extLst>
-                    <a:ext uri="{9D8B030D-6E8A-4147-A177-3AD203B41FA5}">
-                      <a16:colId xmlns:a16="http://schemas.microsoft.com/office/drawing/2014/main" val="1228917521"/>
-                    </a:ext>
-                  </a:extLst>
-                </a:gridCol>
-                <a:gridCol w="3505200">
-                  <a:extLst>
-                    <a:ext uri="{9D8B030D-6E8A-4147-A177-3AD203B41FA5}">
-                      <a16:colId xmlns:a16="http://schemas.microsoft.com/office/drawing/2014/main" val="203849439"/>
-                    </a:ext>
-                  </a:extLst>
-                </a:gridCol>
-              </a:tblGrid>
-              <a:tr h="0">
-                <a:tc>
-                  <a:txBody>
-                    <a:bodyPr/>
-                    <a:lstStyle/>
-                    <a:p>
-                      <a:pPr>
-                        <a:buNone/>
-                      </a:pPr>
-                      <a:r>
-                        <a:rPr lang="en-US">
-                          <a:solidFill>
-                            <a:schemeClr val="accent6">
-                              <a:lumMod val="60000"/>
-                              <a:lumOff val="40000"/>
-                            </a:schemeClr>
-                          </a:solidFill>
-                        </a:rPr>
-                        <a:t>Domain</a:t>
-                      </a:r>
-                    </a:p>
-                  </a:txBody>
-                  <a:tcPr anchor="ctr">
-                    <a:lnL>
-                      <a:noFill/>
-                    </a:lnL>
-                    <a:lnR>
-                      <a:noFill/>
-                    </a:lnR>
-                    <a:lnT>
-                      <a:noFill/>
-                    </a:lnT>
-                    <a:lnB>
-                      <a:noFill/>
-                    </a:lnB>
-                    <a:noFill/>
-                  </a:tcPr>
-                </a:tc>
-                <a:tc>
-                  <a:txBody>
-                    <a:bodyPr/>
-                    <a:lstStyle/>
-                    <a:p>
-                      <a:pPr>
-                        <a:buNone/>
-                      </a:pPr>
-                      <a:r>
-                        <a:rPr lang="en-US">
-                          <a:solidFill>
-                            <a:schemeClr val="accent6">
-                              <a:lumMod val="60000"/>
-                              <a:lumOff val="40000"/>
-                            </a:schemeClr>
-                          </a:solidFill>
-                        </a:rPr>
-                        <a:t>Example</a:t>
-                      </a:r>
-                    </a:p>
-                  </a:txBody>
-                  <a:tcPr anchor="ctr">
-                    <a:lnL>
-                      <a:noFill/>
-                    </a:lnL>
-                    <a:lnR>
-                      <a:noFill/>
-                    </a:lnR>
-                    <a:lnT>
-                      <a:noFill/>
-                    </a:lnT>
-                    <a:lnB>
-                      <a:noFill/>
-                    </a:lnB>
-                    <a:noFill/>
-                  </a:tcPr>
-                </a:tc>
-                <a:tc>
-                  <a:txBody>
-                    <a:bodyPr/>
-                    <a:lstStyle/>
-                    <a:p>
-                      <a:pPr>
-                        <a:buNone/>
-                      </a:pPr>
-                      <a:r>
-                        <a:rPr lang="en-US">
-                          <a:solidFill>
-                            <a:schemeClr val="accent6">
-                              <a:lumMod val="60000"/>
-                              <a:lumOff val="40000"/>
-                            </a:schemeClr>
-                          </a:solidFill>
-                        </a:rPr>
-                        <a:t>Why Compare Variance?</a:t>
-                      </a:r>
-                    </a:p>
-                  </a:txBody>
-                  <a:tcPr anchor="ctr">
-                    <a:lnL>
-                      <a:noFill/>
-                    </a:lnL>
-                    <a:lnR>
-                      <a:noFill/>
-                    </a:lnR>
-                    <a:lnT>
-                      <a:noFill/>
-                    </a:lnT>
-                    <a:lnB>
-                      <a:noFill/>
-                    </a:lnB>
-                    <a:noFill/>
-                  </a:tcPr>
-                </a:tc>
-                <a:extLst>
-                  <a:ext uri="{0D108BD9-81ED-4DB2-BD59-A6C34878D82A}">
-                    <a16:rowId xmlns:a16="http://schemas.microsoft.com/office/drawing/2014/main" val="229991076"/>
-                  </a:ext>
-                </a:extLst>
-              </a:tr>
-              <a:tr h="0">
-                <a:tc>
-                  <a:txBody>
-                    <a:bodyPr/>
-                    <a:lstStyle/>
-                    <a:p>
-                      <a:pPr>
-                        <a:buNone/>
-                      </a:pPr>
-                      <a:r>
-                        <a:rPr lang="en-US" dirty="0">
-                          <a:solidFill>
-                            <a:schemeClr val="accent6">
-                              <a:lumMod val="60000"/>
-                              <a:lumOff val="40000"/>
-                            </a:schemeClr>
-                          </a:solidFill>
-                        </a:rPr>
-                        <a:t>Education</a:t>
-                      </a:r>
-                    </a:p>
-                  </a:txBody>
-                  <a:tcPr anchor="ctr">
-                    <a:lnL>
-                      <a:noFill/>
-                    </a:lnL>
-                    <a:lnR>
-                      <a:noFill/>
-                    </a:lnR>
-                    <a:lnT>
-                      <a:noFill/>
-                    </a:lnT>
-                    <a:lnB>
-                      <a:noFill/>
-                    </a:lnB>
-                    <a:noFill/>
-                  </a:tcPr>
-                </a:tc>
-                <a:tc>
-                  <a:txBody>
-                    <a:bodyPr/>
-                    <a:lstStyle/>
-                    <a:p>
-                      <a:pPr>
-                        <a:buNone/>
-                      </a:pPr>
-                      <a:r>
-                        <a:rPr lang="en-US">
-                          <a:solidFill>
-                            <a:schemeClr val="accent6">
-                              <a:lumMod val="60000"/>
-                              <a:lumOff val="40000"/>
-                            </a:schemeClr>
-                          </a:solidFill>
-                        </a:rPr>
-                        <a:t>Two classes’ exam scores</a:t>
-                      </a:r>
-                    </a:p>
-                  </a:txBody>
-                  <a:tcPr anchor="ctr">
-                    <a:lnL>
-                      <a:noFill/>
-                    </a:lnL>
-                    <a:lnR>
-                      <a:noFill/>
-                    </a:lnR>
-                    <a:lnT>
-                      <a:noFill/>
-                    </a:lnT>
-                    <a:lnB>
-                      <a:noFill/>
-                    </a:lnB>
-                    <a:noFill/>
-                  </a:tcPr>
-                </a:tc>
-                <a:tc>
-                  <a:txBody>
-                    <a:bodyPr/>
-                    <a:lstStyle/>
-                    <a:p>
-                      <a:pPr>
-                        <a:buNone/>
-                      </a:pPr>
-                      <a:r>
-                        <a:rPr lang="en-US">
-                          <a:solidFill>
-                            <a:schemeClr val="accent6">
-                              <a:lumMod val="60000"/>
-                              <a:lumOff val="40000"/>
-                            </a:schemeClr>
-                          </a:solidFill>
-                        </a:rPr>
-                        <a:t>To see which class has more consistent performance</a:t>
-                      </a:r>
-                    </a:p>
-                  </a:txBody>
-                  <a:tcPr anchor="ctr">
-                    <a:lnL>
-                      <a:noFill/>
-                    </a:lnL>
-                    <a:lnR>
-                      <a:noFill/>
-                    </a:lnR>
-                    <a:lnT>
-                      <a:noFill/>
-                    </a:lnT>
-                    <a:lnB>
-                      <a:noFill/>
-                    </a:lnB>
-                    <a:noFill/>
-                  </a:tcPr>
-                </a:tc>
-                <a:extLst>
-                  <a:ext uri="{0D108BD9-81ED-4DB2-BD59-A6C34878D82A}">
-                    <a16:rowId xmlns:a16="http://schemas.microsoft.com/office/drawing/2014/main" val="2109526225"/>
-                  </a:ext>
-                </a:extLst>
-              </a:tr>
-              <a:tr h="0">
-                <a:tc>
-                  <a:txBody>
-                    <a:bodyPr/>
-                    <a:lstStyle/>
-                    <a:p>
-                      <a:pPr>
-                        <a:buNone/>
-                      </a:pPr>
-                      <a:r>
-                        <a:rPr lang="en-US" dirty="0">
-                          <a:solidFill>
-                            <a:schemeClr val="accent6">
-                              <a:lumMod val="60000"/>
-                              <a:lumOff val="40000"/>
-                            </a:schemeClr>
-                          </a:solidFill>
-                        </a:rPr>
-                        <a:t>Medicine</a:t>
-                      </a:r>
-                    </a:p>
-                  </a:txBody>
-                  <a:tcPr anchor="ctr">
-                    <a:lnL>
-                      <a:noFill/>
-                    </a:lnL>
-                    <a:lnR>
-                      <a:noFill/>
-                    </a:lnR>
-                    <a:lnT>
-                      <a:noFill/>
-                    </a:lnT>
-                    <a:lnB>
-                      <a:noFill/>
-                    </a:lnB>
-                    <a:noFill/>
-                  </a:tcPr>
-                </a:tc>
-                <a:tc>
-                  <a:txBody>
-                    <a:bodyPr/>
-                    <a:lstStyle/>
-                    <a:p>
-                      <a:pPr>
-                        <a:buNone/>
-                      </a:pPr>
-                      <a:r>
-                        <a:rPr lang="en-US">
-                          <a:solidFill>
-                            <a:schemeClr val="accent6">
-                              <a:lumMod val="60000"/>
-                              <a:lumOff val="40000"/>
-                            </a:schemeClr>
-                          </a:solidFill>
-                        </a:rPr>
-                        <a:t>Blood pressure readings from two treatments</a:t>
-                      </a:r>
-                    </a:p>
-                  </a:txBody>
-                  <a:tcPr anchor="ctr">
-                    <a:lnL>
-                      <a:noFill/>
-                    </a:lnL>
-                    <a:lnR>
-                      <a:noFill/>
-                    </a:lnR>
-                    <a:lnT>
-                      <a:noFill/>
-                    </a:lnT>
-                    <a:lnB>
-                      <a:noFill/>
-                    </a:lnB>
-                    <a:noFill/>
-                  </a:tcPr>
-                </a:tc>
-                <a:tc>
-                  <a:txBody>
-                    <a:bodyPr/>
-                    <a:lstStyle/>
-                    <a:p>
-                      <a:pPr>
-                        <a:buNone/>
-                      </a:pPr>
-                      <a:r>
-                        <a:rPr lang="en-US">
-                          <a:solidFill>
-                            <a:schemeClr val="accent6">
-                              <a:lumMod val="60000"/>
-                              <a:lumOff val="40000"/>
-                            </a:schemeClr>
-                          </a:solidFill>
-                        </a:rPr>
-                        <a:t>To see if one treatment stabilizes patients better</a:t>
-                      </a:r>
-                    </a:p>
-                  </a:txBody>
-                  <a:tcPr anchor="ctr">
-                    <a:lnL>
-                      <a:noFill/>
-                    </a:lnL>
-                    <a:lnR>
-                      <a:noFill/>
-                    </a:lnR>
-                    <a:lnT>
-                      <a:noFill/>
-                    </a:lnT>
-                    <a:lnB>
-                      <a:noFill/>
-                    </a:lnB>
-                    <a:noFill/>
-                  </a:tcPr>
-                </a:tc>
-                <a:extLst>
-                  <a:ext uri="{0D108BD9-81ED-4DB2-BD59-A6C34878D82A}">
-                    <a16:rowId xmlns:a16="http://schemas.microsoft.com/office/drawing/2014/main" val="3567681489"/>
-                  </a:ext>
-                </a:extLst>
-              </a:tr>
-              <a:tr h="0">
-                <a:tc>
-                  <a:txBody>
-                    <a:bodyPr/>
-                    <a:lstStyle/>
-                    <a:p>
-                      <a:pPr>
-                        <a:buNone/>
-                      </a:pPr>
-                      <a:r>
-                        <a:rPr lang="en-US" dirty="0">
-                          <a:solidFill>
-                            <a:schemeClr val="accent6">
-                              <a:lumMod val="60000"/>
-                              <a:lumOff val="40000"/>
-                            </a:schemeClr>
-                          </a:solidFill>
-                        </a:rPr>
-                        <a:t>Manufacturing</a:t>
-                      </a:r>
-                    </a:p>
-                  </a:txBody>
-                  <a:tcPr anchor="ctr">
-                    <a:lnL>
-                      <a:noFill/>
-                    </a:lnL>
-                    <a:lnR>
-                      <a:noFill/>
-                    </a:lnR>
-                    <a:lnT>
-                      <a:noFill/>
-                    </a:lnT>
-                    <a:lnB>
-                      <a:noFill/>
-                    </a:lnB>
-                    <a:noFill/>
-                  </a:tcPr>
-                </a:tc>
-                <a:tc>
-                  <a:txBody>
-                    <a:bodyPr/>
-                    <a:lstStyle/>
-                    <a:p>
-                      <a:pPr>
-                        <a:buNone/>
-                      </a:pPr>
-                      <a:r>
-                        <a:rPr lang="en-US" dirty="0">
-                          <a:solidFill>
-                            <a:schemeClr val="accent6">
-                              <a:lumMod val="60000"/>
-                              <a:lumOff val="40000"/>
-                            </a:schemeClr>
-                          </a:solidFill>
-                        </a:rPr>
-                        <a:t>Diameter of screws from two machines</a:t>
-                      </a:r>
-                    </a:p>
-                  </a:txBody>
-                  <a:tcPr anchor="ctr">
-                    <a:lnL>
-                      <a:noFill/>
-                    </a:lnL>
-                    <a:lnR>
-                      <a:noFill/>
-                    </a:lnR>
-                    <a:lnT>
-                      <a:noFill/>
-                    </a:lnT>
-                    <a:lnB>
-                      <a:noFill/>
-                    </a:lnB>
-                    <a:noFill/>
-                  </a:tcPr>
-                </a:tc>
-                <a:tc>
-                  <a:txBody>
-                    <a:bodyPr/>
-                    <a:lstStyle/>
-                    <a:p>
-                      <a:pPr>
-                        <a:buNone/>
-                      </a:pPr>
-                      <a:r>
-                        <a:rPr lang="en-US">
-                          <a:solidFill>
-                            <a:schemeClr val="accent6">
-                              <a:lumMod val="60000"/>
-                              <a:lumOff val="40000"/>
-                            </a:schemeClr>
-                          </a:solidFill>
-                        </a:rPr>
-                        <a:t>To check which machine produces more consistent sizes</a:t>
-                      </a:r>
-                    </a:p>
-                  </a:txBody>
-                  <a:tcPr anchor="ctr">
-                    <a:lnL>
-                      <a:noFill/>
-                    </a:lnL>
-                    <a:lnR>
-                      <a:noFill/>
-                    </a:lnR>
-                    <a:lnT>
-                      <a:noFill/>
-                    </a:lnT>
-                    <a:lnB>
-                      <a:noFill/>
-                    </a:lnB>
-                    <a:noFill/>
-                  </a:tcPr>
-                </a:tc>
-                <a:extLst>
-                  <a:ext uri="{0D108BD9-81ED-4DB2-BD59-A6C34878D82A}">
-                    <a16:rowId xmlns:a16="http://schemas.microsoft.com/office/drawing/2014/main" val="1658348641"/>
-                  </a:ext>
-                </a:extLst>
-              </a:tr>
-              <a:tr h="0">
-                <a:tc>
-                  <a:txBody>
-                    <a:bodyPr/>
-                    <a:lstStyle/>
-                    <a:p>
-                      <a:pPr>
-                        <a:buNone/>
-                      </a:pPr>
-                      <a:r>
-                        <a:rPr lang="en-US" dirty="0">
-                          <a:solidFill>
-                            <a:schemeClr val="accent6">
-                              <a:lumMod val="60000"/>
-                              <a:lumOff val="40000"/>
-                            </a:schemeClr>
-                          </a:solidFill>
-                        </a:rPr>
-                        <a:t>Finance</a:t>
-                      </a:r>
-                    </a:p>
-                  </a:txBody>
-                  <a:tcPr anchor="ctr">
-                    <a:lnL>
-                      <a:noFill/>
-                    </a:lnL>
-                    <a:lnR>
-                      <a:noFill/>
-                    </a:lnR>
-                    <a:lnT>
-                      <a:noFill/>
-                    </a:lnT>
-                    <a:lnB>
-                      <a:noFill/>
-                    </a:lnB>
-                    <a:noFill/>
-                  </a:tcPr>
-                </a:tc>
-                <a:tc>
-                  <a:txBody>
-                    <a:bodyPr/>
-                    <a:lstStyle/>
-                    <a:p>
-                      <a:pPr>
-                        <a:buNone/>
-                      </a:pPr>
-                      <a:r>
-                        <a:rPr lang="en-US">
-                          <a:solidFill>
-                            <a:schemeClr val="accent6">
-                              <a:lumMod val="60000"/>
-                              <a:lumOff val="40000"/>
-                            </a:schemeClr>
-                          </a:solidFill>
-                        </a:rPr>
-                        <a:t>Returns of two stocks</a:t>
-                      </a:r>
-                    </a:p>
-                  </a:txBody>
-                  <a:tcPr anchor="ctr">
-                    <a:lnL>
-                      <a:noFill/>
-                    </a:lnL>
-                    <a:lnR>
-                      <a:noFill/>
-                    </a:lnR>
-                    <a:lnT>
-                      <a:noFill/>
-                    </a:lnT>
-                    <a:lnB>
-                      <a:noFill/>
-                    </a:lnB>
-                    <a:noFill/>
-                  </a:tcPr>
-                </a:tc>
-                <a:tc>
-                  <a:txBody>
-                    <a:bodyPr/>
-                    <a:lstStyle/>
-                    <a:p>
-                      <a:pPr>
-                        <a:buNone/>
-                      </a:pPr>
-                      <a:r>
-                        <a:rPr lang="en-US">
-                          <a:solidFill>
-                            <a:schemeClr val="accent6">
-                              <a:lumMod val="60000"/>
-                              <a:lumOff val="40000"/>
-                            </a:schemeClr>
-                          </a:solidFill>
-                        </a:rPr>
-                        <a:t>To find which stock is more volatile (riskier)</a:t>
-                      </a:r>
-                    </a:p>
-                  </a:txBody>
-                  <a:tcPr anchor="ctr">
-                    <a:lnL>
-                      <a:noFill/>
-                    </a:lnL>
-                    <a:lnR>
-                      <a:noFill/>
-                    </a:lnR>
-                    <a:lnT>
-                      <a:noFill/>
-                    </a:lnT>
-                    <a:lnB>
-                      <a:noFill/>
-                    </a:lnB>
-                    <a:noFill/>
-                  </a:tcPr>
-                </a:tc>
-                <a:extLst>
-                  <a:ext uri="{0D108BD9-81ED-4DB2-BD59-A6C34878D82A}">
-                    <a16:rowId xmlns:a16="http://schemas.microsoft.com/office/drawing/2014/main" val="3127762066"/>
-                  </a:ext>
-                </a:extLst>
-              </a:tr>
-              <a:tr h="0">
-                <a:tc>
-                  <a:txBody>
-                    <a:bodyPr/>
-                    <a:lstStyle/>
-                    <a:p>
-                      <a:pPr>
-                        <a:buNone/>
-                      </a:pPr>
-                      <a:r>
-                        <a:rPr lang="en-US" dirty="0">
-                          <a:solidFill>
-                            <a:schemeClr val="accent6">
-                              <a:lumMod val="60000"/>
-                              <a:lumOff val="40000"/>
-                            </a:schemeClr>
-                          </a:solidFill>
-                        </a:rPr>
-                        <a:t>Engineering</a:t>
-                      </a:r>
-                    </a:p>
-                  </a:txBody>
-                  <a:tcPr anchor="ctr">
-                    <a:lnL>
-                      <a:noFill/>
-                    </a:lnL>
-                    <a:lnR>
-                      <a:noFill/>
-                    </a:lnR>
-                    <a:lnT>
-                      <a:noFill/>
-                    </a:lnT>
-                    <a:lnB>
-                      <a:noFill/>
-                    </a:lnB>
-                    <a:noFill/>
-                  </a:tcPr>
-                </a:tc>
-                <a:tc>
-                  <a:txBody>
-                    <a:bodyPr/>
-                    <a:lstStyle/>
-                    <a:p>
-                      <a:pPr>
-                        <a:buNone/>
-                      </a:pPr>
-                      <a:r>
-                        <a:rPr lang="en-US">
-                          <a:solidFill>
-                            <a:schemeClr val="accent6">
-                              <a:lumMod val="60000"/>
-                              <a:lumOff val="40000"/>
-                            </a:schemeClr>
-                          </a:solidFill>
-                        </a:rPr>
-                        <a:t>Measurements from two sensors</a:t>
-                      </a:r>
-                    </a:p>
-                  </a:txBody>
-                  <a:tcPr anchor="ctr">
-                    <a:lnL>
-                      <a:noFill/>
-                    </a:lnL>
-                    <a:lnR>
-                      <a:noFill/>
-                    </a:lnR>
-                    <a:lnT>
-                      <a:noFill/>
-                    </a:lnT>
-                    <a:lnB>
-                      <a:noFill/>
-                    </a:lnB>
-                    <a:noFill/>
-                  </a:tcPr>
-                </a:tc>
-                <a:tc>
-                  <a:txBody>
-                    <a:bodyPr/>
-                    <a:lstStyle/>
-                    <a:p>
-                      <a:pPr>
-                        <a:buNone/>
-                      </a:pPr>
-                      <a:r>
-                        <a:rPr lang="en-US" dirty="0">
-                          <a:solidFill>
-                            <a:schemeClr val="accent6">
-                              <a:lumMod val="60000"/>
-                              <a:lumOff val="40000"/>
-                            </a:schemeClr>
-                          </a:solidFill>
-                        </a:rPr>
-                        <a:t>To ensure sensors have similar accuracy (precision)</a:t>
-                      </a:r>
-                    </a:p>
-                  </a:txBody>
-                  <a:tcPr anchor="ctr">
-                    <a:lnL>
-                      <a:noFill/>
-                    </a:lnL>
-                    <a:lnR>
-                      <a:noFill/>
-                    </a:lnR>
-                    <a:lnT>
-                      <a:noFill/>
-                    </a:lnT>
-                    <a:lnB>
-                      <a:noFill/>
-                    </a:lnB>
-                    <a:noFill/>
-                  </a:tcPr>
-                </a:tc>
-                <a:extLst>
-                  <a:ext uri="{0D108BD9-81ED-4DB2-BD59-A6C34878D82A}">
-                    <a16:rowId xmlns:a16="http://schemas.microsoft.com/office/drawing/2014/main" val="520029419"/>
-                  </a:ext>
-                </a:extLst>
-              </a:tr>
-            </a:tbl>
-          </a:graphicData>
-        </a:graphic>
-      </p:graphicFrame>
-      <p:sp>
-        <p:nvSpPr>
-          <p:cNvPr id="9" name="TextBox 8">
-            <a:extLst>
-              <a:ext uri="{FF2B5EF4-FFF2-40B4-BE49-F238E27FC236}">
-                <a16:creationId xmlns:a16="http://schemas.microsoft.com/office/drawing/2014/main" id="{493EC86F-C960-307F-F4FD-ECBB7FED3E8A}"/>
-              </a:ext>
-            </a:extLst>
-          </p:cNvPr>
-          <p:cNvSpPr txBox="1"/>
-          <p:nvPr/>
-        </p:nvSpPr>
-        <p:spPr>
-          <a:xfrm>
-            <a:off x="603504" y="670852"/>
-            <a:ext cx="11036807" cy="1200329"/>
+            <a:off x="283464" y="670852"/>
+            <a:ext cx="9436608" cy="4524315"/>
           </a:xfrm>
           <a:prstGeom prst="rect">
             <a:avLst/>
@@ -4935,11 +4135,8 @@
           </a:bodyPr>
           <a:lstStyle/>
           <a:p>
-            <a:pPr>
-              <a:buNone/>
-            </a:pPr>
-            <a:r>
-              <a:rPr lang="en-US" dirty="0">
+            <a:r>
+              <a:rPr lang="en-US" sz="2400" dirty="0">
                 <a:solidFill>
                   <a:schemeClr val="accent6">
                     <a:lumMod val="60000"/>
@@ -4950,7 +4147,7 @@
               <a:t>Variance tells us </a:t>
             </a:r>
             <a:r>
-              <a:rPr lang="en-US" b="1" dirty="0">
+              <a:rPr lang="en-US" sz="2400" b="1" dirty="0">
                 <a:solidFill>
                   <a:schemeClr val="accent6">
                     <a:lumMod val="60000"/>
@@ -4961,7 +4158,7 @@
               <a:t>how consistent or variable</a:t>
             </a:r>
             <a:r>
-              <a:rPr lang="en-US" dirty="0">
+              <a:rPr lang="en-US" sz="2400" dirty="0">
                 <a:solidFill>
                   <a:schemeClr val="accent6">
                     <a:lumMod val="60000"/>
@@ -4971,7 +4168,61 @@
               </a:rPr>
               <a:t> the data are.</a:t>
             </a:r>
-            <a:endParaRPr lang="en-US" b="1" dirty="0">
+          </a:p>
+          <a:p>
+            <a:r>
+              <a:rPr lang="en-US" sz="2400" dirty="0">
+                <a:solidFill>
+                  <a:schemeClr val="accent6">
+                    <a:lumMod val="60000"/>
+                    <a:lumOff val="40000"/>
+                  </a:schemeClr>
+                </a:solidFill>
+              </a:rPr>
+              <a:t>Test scores of students in 2 states:</a:t>
+            </a:r>
+          </a:p>
+          <a:p>
+            <a:r>
+              <a:rPr lang="en-US" sz="2400" dirty="0">
+                <a:solidFill>
+                  <a:schemeClr val="accent6">
+                    <a:lumMod val="60000"/>
+                    <a:lumOff val="40000"/>
+                  </a:schemeClr>
+                </a:solidFill>
+              </a:rPr>
+              <a:t>State 1: [32, 43, 45, 36, 44, 37, 33]  - less variation -&gt; more consistent</a:t>
+            </a:r>
+          </a:p>
+          <a:p>
+            <a:r>
+              <a:rPr lang="en-US" sz="2400" dirty="0">
+                <a:solidFill>
+                  <a:schemeClr val="accent6">
+                    <a:lumMod val="60000"/>
+                    <a:lumOff val="40000"/>
+                  </a:schemeClr>
+                </a:solidFill>
+              </a:rPr>
+              <a:t>State 2: [32, 78, 59, 99,   3, 56, 89]  - more variation -&gt; less consistent</a:t>
+            </a:r>
+          </a:p>
+          <a:p>
+            <a:r>
+              <a:rPr lang="en-US" sz="2400" dirty="0">
+                <a:solidFill>
+                  <a:schemeClr val="accent6">
+                    <a:lumMod val="60000"/>
+                    <a:lumOff val="40000"/>
+                  </a:schemeClr>
+                </a:solidFill>
+              </a:rPr>
+              <a:t>  </a:t>
+            </a:r>
+          </a:p>
+          <a:p>
+            <a:endParaRPr lang="en-US" sz="2400" dirty="0">
               <a:solidFill>
                 <a:schemeClr val="accent6">
                   <a:lumMod val="60000"/>
@@ -4981,11 +4232,8 @@
             </a:endParaRPr>
           </a:p>
           <a:p>
-            <a:pPr>
-              <a:buNone/>
-            </a:pPr>
-            <a:r>
-              <a:rPr lang="en-US" b="1" dirty="0">
+            <a:r>
+              <a:rPr lang="en-US" sz="2400" b="1" dirty="0">
                 <a:solidFill>
                   <a:schemeClr val="accent6">
                     <a:lumMod val="60000"/>
@@ -4995,13 +4243,18 @@
               </a:rPr>
               <a:t>When Do We Compare Variances?</a:t>
             </a:r>
-          </a:p>
-          <a:p>
-            <a:pPr>
-              <a:buNone/>
-            </a:pPr>
-            <a:r>
-              <a:rPr lang="en-US" dirty="0">
+            <a:endParaRPr lang="en-US" sz="2400" dirty="0">
+              <a:solidFill>
+                <a:schemeClr val="accent6">
+                  <a:lumMod val="60000"/>
+                  <a:lumOff val="40000"/>
+                </a:schemeClr>
+              </a:solidFill>
+            </a:endParaRPr>
+          </a:p>
+          <a:p>
+            <a:r>
+              <a:rPr lang="en-US" sz="2400" dirty="0">
                 <a:solidFill>
                   <a:schemeClr val="accent6">
                     <a:lumMod val="60000"/>
@@ -5011,8 +4264,10 @@
               </a:rPr>
               <a:t>We compare variances when we want to test or understand </a:t>
             </a:r>
-            <a:r>
-              <a:rPr lang="en-US" b="1" dirty="0">
+          </a:p>
+          <a:p>
+            <a:r>
+              <a:rPr lang="en-US" sz="2400" b="1" dirty="0">
                 <a:solidFill>
                   <a:schemeClr val="accent6">
                     <a:lumMod val="60000"/>
@@ -5023,7 +4278,7 @@
               <a:t>differences in variability</a:t>
             </a:r>
             <a:r>
-              <a:rPr lang="en-US" dirty="0">
+              <a:rPr lang="en-US" sz="2400" dirty="0">
                 <a:solidFill>
                   <a:schemeClr val="accent6">
                     <a:lumMod val="60000"/>
@@ -5033,8 +4288,10 @@
               </a:rPr>
               <a:t> — not the means.</a:t>
             </a:r>
-            <a:br>
-              <a:rPr lang="en-US" dirty="0">
+          </a:p>
+          <a:p>
+            <a:r>
+              <a:rPr lang="en-US" sz="2400" dirty="0">
                 <a:solidFill>
                   <a:schemeClr val="accent6">
                     <a:lumMod val="60000"/>
@@ -5042,9 +4299,12 @@
                   </a:schemeClr>
                 </a:solidFill>
               </a:rPr>
-            </a:br>
-            <a:r>
-              <a:rPr lang="en-US" dirty="0">
+              <a:t>Example: Looking at test scores based on state</a:t>
+            </a:r>
+          </a:p>
+          <a:p>
+            <a:r>
+              <a:rPr lang="en-US" sz="2400" dirty="0">
                 <a:solidFill>
                   <a:schemeClr val="accent6">
                     <a:lumMod val="60000"/>
@@ -5052,7 +4312,20 @@
                   </a:schemeClr>
                 </a:solidFill>
               </a:rPr>
-              <a:t>Typical situations include:</a:t>
+              <a:t>State 1: [32, 43, 45, 36, 44, 37, 33]</a:t>
+            </a:r>
+          </a:p>
+          <a:p>
+            <a:r>
+              <a:rPr lang="en-US" sz="2400" dirty="0">
+                <a:solidFill>
+                  <a:schemeClr val="accent6">
+                    <a:lumMod val="60000"/>
+                    <a:lumOff val="40000"/>
+                  </a:schemeClr>
+                </a:solidFill>
+              </a:rPr>
+              <a:t>State 2: [20, 78, 59, 99, 3,   56, 89]</a:t>
             </a:r>
           </a:p>
         </p:txBody>
@@ -5087,57 +4360,808 @@
           <a:chExt cx="0" cy="0"/>
         </a:xfrm>
       </p:grpSpPr>
-      <p:sp>
-        <p:nvSpPr>
-          <p:cNvPr id="2" name="Title 1">
-            <a:extLst>
-              <a:ext uri="{FF2B5EF4-FFF2-40B4-BE49-F238E27FC236}">
-                <a16:creationId xmlns:a16="http://schemas.microsoft.com/office/drawing/2014/main" id="{76BB9F27-036C-DF25-1663-ADB3FB20CF35}"/>
-              </a:ext>
-            </a:extLst>
-          </p:cNvPr>
-          <p:cNvSpPr>
-            <a:spLocks noGrp="1"/>
-          </p:cNvSpPr>
-          <p:nvPr>
-            <p:ph type="title"/>
-          </p:nvPr>
-        </p:nvSpPr>
-        <p:spPr/>
-        <p:txBody>
-          <a:bodyPr/>
+      <p:graphicFrame>
+        <p:nvGraphicFramePr>
+          <p:cNvPr id="6" name="Table 5">
+            <a:extLst>
+              <a:ext uri="{FF2B5EF4-FFF2-40B4-BE49-F238E27FC236}">
+                <a16:creationId xmlns:a16="http://schemas.microsoft.com/office/drawing/2014/main" id="{45DF5CCC-6C41-20C6-BFCA-85976D95FC64}"/>
+              </a:ext>
+            </a:extLst>
+          </p:cNvPr>
+          <p:cNvGraphicFramePr>
+            <a:graphicFrameLocks noGrp="1"/>
+          </p:cNvGraphicFramePr>
+          <p:nvPr>
+            <p:extLst>
+              <p:ext uri="{D42A27DB-BD31-4B8C-83A1-F6EECF244321}">
+                <p14:modId xmlns:p14="http://schemas.microsoft.com/office/powerpoint/2010/main" val="1481209313"/>
+              </p:ext>
+            </p:extLst>
+          </p:nvPr>
+        </p:nvGraphicFramePr>
+        <p:xfrm>
+          <a:off x="106680" y="1188720"/>
+          <a:ext cx="11917680" cy="4937760"/>
+        </p:xfrm>
+        <a:graphic>
+          <a:graphicData uri="http://schemas.openxmlformats.org/drawingml/2006/table">
+            <a:tbl>
+              <a:tblPr/>
+              <a:tblGrid>
+                <a:gridCol w="2124456">
+                  <a:extLst>
+                    <a:ext uri="{9D8B030D-6E8A-4147-A177-3AD203B41FA5}">
+                      <a16:colId xmlns:a16="http://schemas.microsoft.com/office/drawing/2014/main" val="4178535945"/>
+                    </a:ext>
+                  </a:extLst>
+                </a:gridCol>
+                <a:gridCol w="5925312">
+                  <a:extLst>
+                    <a:ext uri="{9D8B030D-6E8A-4147-A177-3AD203B41FA5}">
+                      <a16:colId xmlns:a16="http://schemas.microsoft.com/office/drawing/2014/main" val="1228917521"/>
+                    </a:ext>
+                  </a:extLst>
+                </a:gridCol>
+                <a:gridCol w="3867912">
+                  <a:extLst>
+                    <a:ext uri="{9D8B030D-6E8A-4147-A177-3AD203B41FA5}">
+                      <a16:colId xmlns:a16="http://schemas.microsoft.com/office/drawing/2014/main" val="203849439"/>
+                    </a:ext>
+                  </a:extLst>
+                </a:gridCol>
+              </a:tblGrid>
+              <a:tr h="0">
+                <a:tc>
+                  <a:txBody>
+                    <a:bodyPr/>
+                    <a:lstStyle/>
+                    <a:p>
+                      <a:pPr algn="ctr">
+                        <a:buNone/>
+                      </a:pPr>
+                      <a:r>
+                        <a:rPr lang="en-US" sz="2400" b="1" u="sng" dirty="0">
+                          <a:solidFill>
+                            <a:schemeClr val="accent6">
+                              <a:lumMod val="60000"/>
+                              <a:lumOff val="40000"/>
+                            </a:schemeClr>
+                          </a:solidFill>
+                        </a:rPr>
+                        <a:t>Domain</a:t>
+                      </a:r>
+                    </a:p>
+                  </a:txBody>
+                  <a:tcPr anchor="ctr">
+                    <a:lnL>
+                      <a:noFill/>
+                    </a:lnL>
+                    <a:lnR>
+                      <a:noFill/>
+                    </a:lnR>
+                    <a:lnT>
+                      <a:noFill/>
+                    </a:lnT>
+                    <a:lnB>
+                      <a:noFill/>
+                    </a:lnB>
+                    <a:noFill/>
+                  </a:tcPr>
+                </a:tc>
+                <a:tc>
+                  <a:txBody>
+                    <a:bodyPr/>
+                    <a:lstStyle/>
+                    <a:p>
+                      <a:pPr algn="ctr">
+                        <a:buNone/>
+                      </a:pPr>
+                      <a:r>
+                        <a:rPr lang="en-US" sz="2400" b="1" u="sng">
+                          <a:solidFill>
+                            <a:schemeClr val="accent6">
+                              <a:lumMod val="60000"/>
+                              <a:lumOff val="40000"/>
+                            </a:schemeClr>
+                          </a:solidFill>
+                        </a:rPr>
+                        <a:t>Example</a:t>
+                      </a:r>
+                    </a:p>
+                  </a:txBody>
+                  <a:tcPr anchor="ctr">
+                    <a:lnL>
+                      <a:noFill/>
+                    </a:lnL>
+                    <a:lnR>
+                      <a:noFill/>
+                    </a:lnR>
+                    <a:lnT>
+                      <a:noFill/>
+                    </a:lnT>
+                    <a:lnB>
+                      <a:noFill/>
+                    </a:lnB>
+                    <a:noFill/>
+                  </a:tcPr>
+                </a:tc>
+                <a:tc>
+                  <a:txBody>
+                    <a:bodyPr/>
+                    <a:lstStyle/>
+                    <a:p>
+                      <a:pPr algn="ctr">
+                        <a:buNone/>
+                      </a:pPr>
+                      <a:r>
+                        <a:rPr lang="en-US" sz="2400" b="1" u="sng" dirty="0">
+                          <a:solidFill>
+                            <a:schemeClr val="accent6">
+                              <a:lumMod val="60000"/>
+                              <a:lumOff val="40000"/>
+                            </a:schemeClr>
+                          </a:solidFill>
+                        </a:rPr>
+                        <a:t>Why Compare Variance?</a:t>
+                      </a:r>
+                    </a:p>
+                  </a:txBody>
+                  <a:tcPr anchor="ctr">
+                    <a:lnL>
+                      <a:noFill/>
+                    </a:lnL>
+                    <a:lnR>
+                      <a:noFill/>
+                    </a:lnR>
+                    <a:lnT>
+                      <a:noFill/>
+                    </a:lnT>
+                    <a:lnB>
+                      <a:noFill/>
+                    </a:lnB>
+                    <a:noFill/>
+                  </a:tcPr>
+                </a:tc>
+                <a:extLst>
+                  <a:ext uri="{0D108BD9-81ED-4DB2-BD59-A6C34878D82A}">
+                    <a16:rowId xmlns:a16="http://schemas.microsoft.com/office/drawing/2014/main" val="229991076"/>
+                  </a:ext>
+                </a:extLst>
+              </a:tr>
+              <a:tr h="0">
+                <a:tc>
+                  <a:txBody>
+                    <a:bodyPr/>
+                    <a:lstStyle/>
+                    <a:p>
+                      <a:pPr algn="ctr">
+                        <a:buNone/>
+                      </a:pPr>
+                      <a:r>
+                        <a:rPr lang="en-US" sz="2400" dirty="0">
+                          <a:solidFill>
+                            <a:schemeClr val="accent6">
+                              <a:lumMod val="60000"/>
+                              <a:lumOff val="40000"/>
+                            </a:schemeClr>
+                          </a:solidFill>
+                        </a:rPr>
+                        <a:t>Education</a:t>
+                      </a:r>
+                    </a:p>
+                  </a:txBody>
+                  <a:tcPr anchor="ctr">
+                    <a:lnL>
+                      <a:noFill/>
+                    </a:lnL>
+                    <a:lnR>
+                      <a:noFill/>
+                    </a:lnR>
+                    <a:lnT>
+                      <a:noFill/>
+                    </a:lnT>
+                    <a:lnB>
+                      <a:noFill/>
+                    </a:lnB>
+                    <a:noFill/>
+                  </a:tcPr>
+                </a:tc>
+                <a:tc>
+                  <a:txBody>
+                    <a:bodyPr/>
+                    <a:lstStyle/>
+                    <a:p>
+                      <a:pPr algn="ctr">
+                        <a:buNone/>
+                      </a:pPr>
+                      <a:r>
+                        <a:rPr lang="en-US" sz="2400" dirty="0">
+                          <a:solidFill>
+                            <a:schemeClr val="accent6">
+                              <a:lumMod val="60000"/>
+                              <a:lumOff val="40000"/>
+                            </a:schemeClr>
+                          </a:solidFill>
+                        </a:rPr>
+                        <a:t>Two classes’ exam scores</a:t>
+                      </a:r>
+                    </a:p>
+                  </a:txBody>
+                  <a:tcPr anchor="ctr">
+                    <a:lnL>
+                      <a:noFill/>
+                    </a:lnL>
+                    <a:lnR>
+                      <a:noFill/>
+                    </a:lnR>
+                    <a:lnT>
+                      <a:noFill/>
+                    </a:lnT>
+                    <a:lnB>
+                      <a:noFill/>
+                    </a:lnB>
+                    <a:noFill/>
+                  </a:tcPr>
+                </a:tc>
+                <a:tc>
+                  <a:txBody>
+                    <a:bodyPr/>
+                    <a:lstStyle/>
+                    <a:p>
+                      <a:pPr algn="ctr">
+                        <a:buNone/>
+                      </a:pPr>
+                      <a:r>
+                        <a:rPr lang="en-US" sz="2400" dirty="0">
+                          <a:solidFill>
+                            <a:schemeClr val="accent6">
+                              <a:lumMod val="60000"/>
+                              <a:lumOff val="40000"/>
+                            </a:schemeClr>
+                          </a:solidFill>
+                        </a:rPr>
+                        <a:t>To see which class has more consistent performance</a:t>
+                      </a:r>
+                    </a:p>
+                  </a:txBody>
+                  <a:tcPr anchor="ctr">
+                    <a:lnL>
+                      <a:noFill/>
+                    </a:lnL>
+                    <a:lnR>
+                      <a:noFill/>
+                    </a:lnR>
+                    <a:lnT>
+                      <a:noFill/>
+                    </a:lnT>
+                    <a:lnB>
+                      <a:noFill/>
+                    </a:lnB>
+                    <a:noFill/>
+                  </a:tcPr>
+                </a:tc>
+                <a:extLst>
+                  <a:ext uri="{0D108BD9-81ED-4DB2-BD59-A6C34878D82A}">
+                    <a16:rowId xmlns:a16="http://schemas.microsoft.com/office/drawing/2014/main" val="2109526225"/>
+                  </a:ext>
+                </a:extLst>
+              </a:tr>
+              <a:tr h="0">
+                <a:tc>
+                  <a:txBody>
+                    <a:bodyPr/>
+                    <a:lstStyle/>
+                    <a:p>
+                      <a:pPr algn="ctr">
+                        <a:buNone/>
+                      </a:pPr>
+                      <a:r>
+                        <a:rPr lang="en-US" sz="2400" dirty="0">
+                          <a:solidFill>
+                            <a:schemeClr val="accent6">
+                              <a:lumMod val="60000"/>
+                              <a:lumOff val="40000"/>
+                            </a:schemeClr>
+                          </a:solidFill>
+                        </a:rPr>
+                        <a:t>Medicine</a:t>
+                      </a:r>
+                    </a:p>
+                  </a:txBody>
+                  <a:tcPr anchor="ctr">
+                    <a:lnL>
+                      <a:noFill/>
+                    </a:lnL>
+                    <a:lnR>
+                      <a:noFill/>
+                    </a:lnR>
+                    <a:lnT>
+                      <a:noFill/>
+                    </a:lnT>
+                    <a:lnB>
+                      <a:noFill/>
+                    </a:lnB>
+                    <a:noFill/>
+                  </a:tcPr>
+                </a:tc>
+                <a:tc>
+                  <a:txBody>
+                    <a:bodyPr/>
+                    <a:lstStyle/>
+                    <a:p>
+                      <a:pPr algn="ctr">
+                        <a:buNone/>
+                      </a:pPr>
+                      <a:r>
+                        <a:rPr lang="en-US" sz="2400" dirty="0">
+                          <a:solidFill>
+                            <a:schemeClr val="accent6">
+                              <a:lumMod val="60000"/>
+                              <a:lumOff val="40000"/>
+                            </a:schemeClr>
+                          </a:solidFill>
+                        </a:rPr>
+                        <a:t>Blood pressure readings from two treatments</a:t>
+                      </a:r>
+                    </a:p>
+                  </a:txBody>
+                  <a:tcPr anchor="ctr">
+                    <a:lnL>
+                      <a:noFill/>
+                    </a:lnL>
+                    <a:lnR>
+                      <a:noFill/>
+                    </a:lnR>
+                    <a:lnT>
+                      <a:noFill/>
+                    </a:lnT>
+                    <a:lnB>
+                      <a:noFill/>
+                    </a:lnB>
+                    <a:noFill/>
+                  </a:tcPr>
+                </a:tc>
+                <a:tc>
+                  <a:txBody>
+                    <a:bodyPr/>
+                    <a:lstStyle/>
+                    <a:p>
+                      <a:pPr algn="ctr">
+                        <a:buNone/>
+                      </a:pPr>
+                      <a:r>
+                        <a:rPr lang="en-US" sz="2400">
+                          <a:solidFill>
+                            <a:schemeClr val="accent6">
+                              <a:lumMod val="60000"/>
+                              <a:lumOff val="40000"/>
+                            </a:schemeClr>
+                          </a:solidFill>
+                        </a:rPr>
+                        <a:t>To see if one treatment stabilizes patients better</a:t>
+                      </a:r>
+                    </a:p>
+                  </a:txBody>
+                  <a:tcPr anchor="ctr">
+                    <a:lnL>
+                      <a:noFill/>
+                    </a:lnL>
+                    <a:lnR>
+                      <a:noFill/>
+                    </a:lnR>
+                    <a:lnT>
+                      <a:noFill/>
+                    </a:lnT>
+                    <a:lnB>
+                      <a:noFill/>
+                    </a:lnB>
+                    <a:noFill/>
+                  </a:tcPr>
+                </a:tc>
+                <a:extLst>
+                  <a:ext uri="{0D108BD9-81ED-4DB2-BD59-A6C34878D82A}">
+                    <a16:rowId xmlns:a16="http://schemas.microsoft.com/office/drawing/2014/main" val="3567681489"/>
+                  </a:ext>
+                </a:extLst>
+              </a:tr>
+              <a:tr h="0">
+                <a:tc>
+                  <a:txBody>
+                    <a:bodyPr/>
+                    <a:lstStyle/>
+                    <a:p>
+                      <a:pPr algn="ctr">
+                        <a:buNone/>
+                      </a:pPr>
+                      <a:r>
+                        <a:rPr lang="en-US" sz="2400" dirty="0">
+                          <a:solidFill>
+                            <a:schemeClr val="accent6">
+                              <a:lumMod val="60000"/>
+                              <a:lumOff val="40000"/>
+                            </a:schemeClr>
+                          </a:solidFill>
+                        </a:rPr>
+                        <a:t>Manufacturing</a:t>
+                      </a:r>
+                    </a:p>
+                  </a:txBody>
+                  <a:tcPr anchor="ctr">
+                    <a:lnL>
+                      <a:noFill/>
+                    </a:lnL>
+                    <a:lnR>
+                      <a:noFill/>
+                    </a:lnR>
+                    <a:lnT>
+                      <a:noFill/>
+                    </a:lnT>
+                    <a:lnB>
+                      <a:noFill/>
+                    </a:lnB>
+                    <a:noFill/>
+                  </a:tcPr>
+                </a:tc>
+                <a:tc>
+                  <a:txBody>
+                    <a:bodyPr/>
+                    <a:lstStyle/>
+                    <a:p>
+                      <a:pPr algn="ctr">
+                        <a:buNone/>
+                      </a:pPr>
+                      <a:r>
+                        <a:rPr lang="en-US" sz="2400" dirty="0">
+                          <a:solidFill>
+                            <a:schemeClr val="accent6">
+                              <a:lumMod val="60000"/>
+                              <a:lumOff val="40000"/>
+                            </a:schemeClr>
+                          </a:solidFill>
+                        </a:rPr>
+                        <a:t>Diameter of screws from two machines</a:t>
+                      </a:r>
+                    </a:p>
+                  </a:txBody>
+                  <a:tcPr anchor="ctr">
+                    <a:lnL>
+                      <a:noFill/>
+                    </a:lnL>
+                    <a:lnR>
+                      <a:noFill/>
+                    </a:lnR>
+                    <a:lnT>
+                      <a:noFill/>
+                    </a:lnT>
+                    <a:lnB>
+                      <a:noFill/>
+                    </a:lnB>
+                    <a:noFill/>
+                  </a:tcPr>
+                </a:tc>
+                <a:tc>
+                  <a:txBody>
+                    <a:bodyPr/>
+                    <a:lstStyle/>
+                    <a:p>
+                      <a:pPr algn="ctr">
+                        <a:buNone/>
+                      </a:pPr>
+                      <a:r>
+                        <a:rPr lang="en-US" sz="2400">
+                          <a:solidFill>
+                            <a:schemeClr val="accent6">
+                              <a:lumMod val="60000"/>
+                              <a:lumOff val="40000"/>
+                            </a:schemeClr>
+                          </a:solidFill>
+                        </a:rPr>
+                        <a:t>To check which machine produces more consistent sizes</a:t>
+                      </a:r>
+                    </a:p>
+                  </a:txBody>
+                  <a:tcPr anchor="ctr">
+                    <a:lnL>
+                      <a:noFill/>
+                    </a:lnL>
+                    <a:lnR>
+                      <a:noFill/>
+                    </a:lnR>
+                    <a:lnT>
+                      <a:noFill/>
+                    </a:lnT>
+                    <a:lnB>
+                      <a:noFill/>
+                    </a:lnB>
+                    <a:noFill/>
+                  </a:tcPr>
+                </a:tc>
+                <a:extLst>
+                  <a:ext uri="{0D108BD9-81ED-4DB2-BD59-A6C34878D82A}">
+                    <a16:rowId xmlns:a16="http://schemas.microsoft.com/office/drawing/2014/main" val="1658348641"/>
+                  </a:ext>
+                </a:extLst>
+              </a:tr>
+              <a:tr h="0">
+                <a:tc>
+                  <a:txBody>
+                    <a:bodyPr/>
+                    <a:lstStyle/>
+                    <a:p>
+                      <a:pPr algn="ctr">
+                        <a:buNone/>
+                      </a:pPr>
+                      <a:r>
+                        <a:rPr lang="en-US" sz="2400" dirty="0">
+                          <a:solidFill>
+                            <a:schemeClr val="accent6">
+                              <a:lumMod val="60000"/>
+                              <a:lumOff val="40000"/>
+                            </a:schemeClr>
+                          </a:solidFill>
+                        </a:rPr>
+                        <a:t>Finance</a:t>
+                      </a:r>
+                    </a:p>
+                  </a:txBody>
+                  <a:tcPr anchor="ctr">
+                    <a:lnL>
+                      <a:noFill/>
+                    </a:lnL>
+                    <a:lnR>
+                      <a:noFill/>
+                    </a:lnR>
+                    <a:lnT>
+                      <a:noFill/>
+                    </a:lnT>
+                    <a:lnB>
+                      <a:noFill/>
+                    </a:lnB>
+                    <a:noFill/>
+                  </a:tcPr>
+                </a:tc>
+                <a:tc>
+                  <a:txBody>
+                    <a:bodyPr/>
+                    <a:lstStyle/>
+                    <a:p>
+                      <a:pPr algn="ctr">
+                        <a:buNone/>
+                      </a:pPr>
+                      <a:r>
+                        <a:rPr lang="en-US" sz="2400" dirty="0">
+                          <a:solidFill>
+                            <a:schemeClr val="accent6">
+                              <a:lumMod val="60000"/>
+                              <a:lumOff val="40000"/>
+                            </a:schemeClr>
+                          </a:solidFill>
+                        </a:rPr>
+                        <a:t>Returns of two stocks</a:t>
+                      </a:r>
+                    </a:p>
+                  </a:txBody>
+                  <a:tcPr anchor="ctr">
+                    <a:lnL>
+                      <a:noFill/>
+                    </a:lnL>
+                    <a:lnR>
+                      <a:noFill/>
+                    </a:lnR>
+                    <a:lnT>
+                      <a:noFill/>
+                    </a:lnT>
+                    <a:lnB>
+                      <a:noFill/>
+                    </a:lnB>
+                    <a:noFill/>
+                  </a:tcPr>
+                </a:tc>
+                <a:tc>
+                  <a:txBody>
+                    <a:bodyPr/>
+                    <a:lstStyle/>
+                    <a:p>
+                      <a:pPr algn="ctr">
+                        <a:buNone/>
+                      </a:pPr>
+                      <a:r>
+                        <a:rPr lang="en-US" sz="2400">
+                          <a:solidFill>
+                            <a:schemeClr val="accent6">
+                              <a:lumMod val="60000"/>
+                              <a:lumOff val="40000"/>
+                            </a:schemeClr>
+                          </a:solidFill>
+                        </a:rPr>
+                        <a:t>To find which stock is more volatile (riskier)</a:t>
+                      </a:r>
+                    </a:p>
+                  </a:txBody>
+                  <a:tcPr anchor="ctr">
+                    <a:lnL>
+                      <a:noFill/>
+                    </a:lnL>
+                    <a:lnR>
+                      <a:noFill/>
+                    </a:lnR>
+                    <a:lnT>
+                      <a:noFill/>
+                    </a:lnT>
+                    <a:lnB>
+                      <a:noFill/>
+                    </a:lnB>
+                    <a:noFill/>
+                  </a:tcPr>
+                </a:tc>
+                <a:extLst>
+                  <a:ext uri="{0D108BD9-81ED-4DB2-BD59-A6C34878D82A}">
+                    <a16:rowId xmlns:a16="http://schemas.microsoft.com/office/drawing/2014/main" val="3127762066"/>
+                  </a:ext>
+                </a:extLst>
+              </a:tr>
+              <a:tr h="0">
+                <a:tc>
+                  <a:txBody>
+                    <a:bodyPr/>
+                    <a:lstStyle/>
+                    <a:p>
+                      <a:pPr algn="ctr">
+                        <a:buNone/>
+                      </a:pPr>
+                      <a:r>
+                        <a:rPr lang="en-US" sz="2400" dirty="0">
+                          <a:solidFill>
+                            <a:schemeClr val="accent6">
+                              <a:lumMod val="60000"/>
+                              <a:lumOff val="40000"/>
+                            </a:schemeClr>
+                          </a:solidFill>
+                        </a:rPr>
+                        <a:t>Engineering</a:t>
+                      </a:r>
+                    </a:p>
+                  </a:txBody>
+                  <a:tcPr anchor="ctr">
+                    <a:lnL>
+                      <a:noFill/>
+                    </a:lnL>
+                    <a:lnR>
+                      <a:noFill/>
+                    </a:lnR>
+                    <a:lnT>
+                      <a:noFill/>
+                    </a:lnT>
+                    <a:lnB>
+                      <a:noFill/>
+                    </a:lnB>
+                    <a:noFill/>
+                  </a:tcPr>
+                </a:tc>
+                <a:tc>
+                  <a:txBody>
+                    <a:bodyPr/>
+                    <a:lstStyle/>
+                    <a:p>
+                      <a:pPr algn="ctr">
+                        <a:buNone/>
+                      </a:pPr>
+                      <a:r>
+                        <a:rPr lang="en-US" sz="2400" dirty="0">
+                          <a:solidFill>
+                            <a:schemeClr val="accent6">
+                              <a:lumMod val="60000"/>
+                              <a:lumOff val="40000"/>
+                            </a:schemeClr>
+                          </a:solidFill>
+                        </a:rPr>
+                        <a:t>Measurements from two sensors</a:t>
+                      </a:r>
+                    </a:p>
+                  </a:txBody>
+                  <a:tcPr anchor="ctr">
+                    <a:lnL>
+                      <a:noFill/>
+                    </a:lnL>
+                    <a:lnR>
+                      <a:noFill/>
+                    </a:lnR>
+                    <a:lnT>
+                      <a:noFill/>
+                    </a:lnT>
+                    <a:lnB>
+                      <a:noFill/>
+                    </a:lnB>
+                    <a:noFill/>
+                  </a:tcPr>
+                </a:tc>
+                <a:tc>
+                  <a:txBody>
+                    <a:bodyPr/>
+                    <a:lstStyle/>
+                    <a:p>
+                      <a:pPr algn="ctr">
+                        <a:buNone/>
+                      </a:pPr>
+                      <a:r>
+                        <a:rPr lang="en-US" sz="2400" dirty="0">
+                          <a:solidFill>
+                            <a:schemeClr val="accent6">
+                              <a:lumMod val="60000"/>
+                              <a:lumOff val="40000"/>
+                            </a:schemeClr>
+                          </a:solidFill>
+                        </a:rPr>
+                        <a:t>To ensure sensors have similar accuracy (precision)</a:t>
+                      </a:r>
+                    </a:p>
+                  </a:txBody>
+                  <a:tcPr anchor="ctr">
+                    <a:lnL>
+                      <a:noFill/>
+                    </a:lnL>
+                    <a:lnR>
+                      <a:noFill/>
+                    </a:lnR>
+                    <a:lnT>
+                      <a:noFill/>
+                    </a:lnT>
+                    <a:lnB>
+                      <a:noFill/>
+                    </a:lnB>
+                    <a:noFill/>
+                  </a:tcPr>
+                </a:tc>
+                <a:extLst>
+                  <a:ext uri="{0D108BD9-81ED-4DB2-BD59-A6C34878D82A}">
+                    <a16:rowId xmlns:a16="http://schemas.microsoft.com/office/drawing/2014/main" val="520029419"/>
+                  </a:ext>
+                </a:extLst>
+              </a:tr>
+            </a:tbl>
+          </a:graphicData>
+        </a:graphic>
+      </p:graphicFrame>
+      <p:sp>
+        <p:nvSpPr>
+          <p:cNvPr id="3" name="TextBox 2">
+            <a:extLst>
+              <a:ext uri="{FF2B5EF4-FFF2-40B4-BE49-F238E27FC236}">
+                <a16:creationId xmlns:a16="http://schemas.microsoft.com/office/drawing/2014/main" id="{1CC981CD-43BA-24D2-FC9F-0EF828DC0CAF}"/>
+              </a:ext>
+            </a:extLst>
+          </p:cNvPr>
+          <p:cNvSpPr txBox="1"/>
+          <p:nvPr/>
+        </p:nvSpPr>
+        <p:spPr>
+          <a:xfrm>
+            <a:off x="626364" y="188899"/>
+            <a:ext cx="6263640" cy="461665"/>
+          </a:xfrm>
+          <a:prstGeom prst="rect">
+            <a:avLst/>
+          </a:prstGeom>
+          <a:noFill/>
+        </p:spPr>
+        <p:txBody>
+          <a:bodyPr wrap="square">
+            <a:spAutoFit/>
+          </a:bodyPr>
           <a:lstStyle/>
           <a:p>
-            <a:pPr algn="ctr"/>
-            <a:r>
-              <a:rPr lang="en-US" b="1" dirty="0"/>
-              <a:t>STOP</a:t>
-            </a:r>
-          </a:p>
-        </p:txBody>
-      </p:sp>
-      <p:sp>
-        <p:nvSpPr>
-          <p:cNvPr id="3" name="Content Placeholder 2">
-            <a:extLst>
-              <a:ext uri="{FF2B5EF4-FFF2-40B4-BE49-F238E27FC236}">
-                <a16:creationId xmlns:a16="http://schemas.microsoft.com/office/drawing/2014/main" id="{450CBF26-7783-AE9C-FB4A-CF4684A8123A}"/>
-              </a:ext>
-            </a:extLst>
-          </p:cNvPr>
-          <p:cNvSpPr>
-            <a:spLocks noGrp="1"/>
-          </p:cNvSpPr>
-          <p:nvPr>
-            <p:ph idx="1"/>
-          </p:nvPr>
-        </p:nvSpPr>
-        <p:spPr/>
-        <p:txBody>
-          <a:bodyPr/>
-          <a:lstStyle/>
-          <a:p>
-            <a:endParaRPr lang="en-US" dirty="0"/>
+            <a:r>
+              <a:rPr lang="en-US" sz="2400" dirty="0">
+                <a:solidFill>
+                  <a:schemeClr val="accent6">
+                    <a:lumMod val="60000"/>
+                    <a:lumOff val="40000"/>
+                  </a:schemeClr>
+                </a:solidFill>
+              </a:rPr>
+              <a:t>Typical situations include:</a:t>
+            </a:r>
           </a:p>
         </p:txBody>
       </p:sp>
